--- a/classes/parte-5-explotacion-de-sistemas-y-binarios/139-kernel-exploitation-introduccion/clase-139-presentacion.pptx
+++ b/classes/parte-5-explotacion-de-sistemas-y-binarios/139-kernel-exploitation-introduccion/clase-139-presentacion.pptx
@@ -17,6 +17,9 @@
     <p:sldId id="265" r:id="rId16"/>
     <p:sldId id="266" r:id="rId17"/>
     <p:sldId id="267" r:id="rId18"/>
+    <p:sldId id="268" r:id="rId19"/>
+    <p:sldId id="269" r:id="rId20"/>
+    <p:sldId id="270" r:id="rId21"/>
   </p:sldIdLst>
   <p:sldSz cx="9144000" cy="6858000" type="screen4x3"/>
   <p:notesSz cx="6858000" cy="9144000"/>
@@ -3198,7 +3201,7 @@
                   <a:srgbClr val="0B3D2E"/>
                 </a:solidFill>
               </a:rPr>
-              <a:t>⚠️ Errores comunes</a:t>
+              <a:t>✍️ Ejercicios</a:t>
             </a:r>
           </a:p>
         </p:txBody>
@@ -3236,67 +3239,82 @@
                   <a:srgbClr val="22282E"/>
                 </a:solidFill>
               </a:rPr>
-              <a:t>•  Kernel panic / VM colgada — Retorno a user-space mal hecho; guarda/restaura estado (swapgs/iretq)</a:t>
-            </a:r>
-          </a:p>
-          <a:p>
-            <a:pPr>
-              <a:spcAft>
-                <a:spcPts val="600"/>
-              </a:spcAft>
-            </a:pPr>
-            <a:r>
-              <a:rPr sz="1500">
-                <a:solidFill>
-                  <a:srgbClr val="22282E"/>
-                </a:solidFill>
-              </a:rPr>
-              <a:t>•  "no funciona" con KASLR — Necesitas un leak de dirección de kernel</a:t>
-            </a:r>
-          </a:p>
-          <a:p>
-            <a:pPr>
-              <a:spcAft>
-                <a:spcPts val="600"/>
-              </a:spcAft>
-            </a:pPr>
-            <a:r>
-              <a:rPr sz="1500">
-                <a:solidFill>
-                  <a:srgbClr val="22282E"/>
-                </a:solidFill>
-              </a:rPr>
-              <a:t>•  SMEP fault al saltar a user — Usa kernel ROP en vez de ret2usr</a:t>
-            </a:r>
-          </a:p>
-          <a:p>
-            <a:pPr>
-              <a:spcAft>
-                <a:spcPts val="600"/>
-              </a:spcAft>
-            </a:pPr>
-            <a:r>
-              <a:rPr sz="1500">
-                <a:solidFill>
-                  <a:srgbClr val="22282E"/>
-                </a:solidFill>
-              </a:rPr>
-              <a:t>•  Direcciones cambian cada boot — KASLR activo; añade nokaslr para aprender</a:t>
-            </a:r>
-          </a:p>
-          <a:p>
-            <a:pPr>
-              <a:spcAft>
-                <a:spcPts val="600"/>
-              </a:spcAft>
-            </a:pPr>
-            <a:r>
-              <a:rPr sz="1500">
-                <a:solidFill>
-                  <a:srgbClr val="22282E"/>
-                </a:solidFill>
-              </a:rPr>
-              <a:t>•  insmod falla — Módulo compilado contra otros headers; usa los del kernel de la VM</a:t>
+              <a:t>•  Enumera cuatro fuentes de superficie de ataque de un kernel Linux.</a:t>
+            </a:r>
+          </a:p>
+          <a:p>
+            <a:pPr>
+              <a:spcAft>
+                <a:spcPts val="600"/>
+              </a:spcAft>
+            </a:pPr>
+            <a:r>
+              <a:rPr sz="1500">
+                <a:solidFill>
+                  <a:srgbClr val="22282E"/>
+                </a:solidFill>
+              </a:rPr>
+              <a:t>•  Explica por qué SMEP rompe el ret2usr y cómo se evade con kernel ROP.</a:t>
+            </a:r>
+          </a:p>
+          <a:p>
+            <a:pPr>
+              <a:spcAft>
+                <a:spcPts val="600"/>
+              </a:spcAft>
+            </a:pPr>
+            <a:r>
+              <a:rPr sz="1500">
+                <a:solidFill>
+                  <a:srgbClr val="22282E"/>
+                </a:solidFill>
+              </a:rPr>
+              <a:t>•  Describe el papel de preparekernelcred(0) y commitcreds.</a:t>
+            </a:r>
+          </a:p>
+          <a:p>
+            <a:pPr>
+              <a:spcAft>
+                <a:spcPts val="600"/>
+              </a:spcAft>
+            </a:pPr>
+            <a:r>
+              <a:rPr sz="1500">
+                <a:solidFill>
+                  <a:srgbClr val="22282E"/>
+                </a:solidFill>
+              </a:rPr>
+              <a:t>•  Configura QEMU con y sin nokaslr y compara direcciones.</a:t>
+            </a:r>
+          </a:p>
+          <a:p>
+            <a:pPr>
+              <a:spcAft>
+                <a:spcPts val="600"/>
+              </a:spcAft>
+            </a:pPr>
+            <a:r>
+              <a:rPr sz="1500">
+                <a:solidFill>
+                  <a:srgbClr val="22282E"/>
+                </a:solidFill>
+              </a:rPr>
+              <a:t>•  Explica qué complica KPTI en el retorno a user-space.</a:t>
+            </a:r>
+          </a:p>
+          <a:p>
+            <a:pPr>
+              <a:spcAft>
+                <a:spcPts val="600"/>
+              </a:spcAft>
+            </a:pPr>
+            <a:r>
+              <a:rPr sz="1500">
+                <a:solidFill>
+                  <a:srgbClr val="22282E"/>
+                </a:solidFill>
+              </a:rPr>
+              <a:t>•  Identifica un CVE reciente de driver Linux y resume su clase de bug.</a:t>
             </a:r>
           </a:p>
         </p:txBody>
@@ -3347,7 +3365,7 @@
                   <a:srgbClr val="0B3D2E"/>
                 </a:solidFill>
               </a:rPr>
-              <a:t>❓ Preguntas frecuentes</a:t>
+              <a:t>📝 Reto verificable</a:t>
             </a:r>
           </a:p>
         </p:txBody>
@@ -3385,82 +3403,52 @@
                   <a:srgbClr val="22282E"/>
                 </a:solidFill>
               </a:rPr>
-              <a:t>•  ❓ ¿Por qué practicar en QEMU y no en el host? Un fallo de kernel puede colgar o corromper el</a:t>
-            </a:r>
-          </a:p>
-          <a:p>
-            <a:pPr>
-              <a:spcAft>
-                <a:spcPts val="600"/>
-              </a:spcAft>
-            </a:pPr>
-            <a:r>
-              <a:rPr sz="1500">
-                <a:solidFill>
-                  <a:srgbClr val="22282E"/>
-                </a:solidFill>
-              </a:rPr>
-              <a:t>•  sistema; QEMU con snapshots te da un entorno desechable.</a:t>
-            </a:r>
-          </a:p>
-          <a:p>
-            <a:pPr>
-              <a:spcAft>
-                <a:spcPts val="600"/>
-              </a:spcAft>
-            </a:pPr>
-            <a:r>
-              <a:rPr sz="1500">
-                <a:solidFill>
-                  <a:srgbClr val="22282E"/>
-                </a:solidFill>
-              </a:rPr>
-              <a:t>•  ❓ ¿Kernel pwn es mucho más difícil? Tiene más mitigaciones y menos margen de error, pero las bases</a:t>
-            </a:r>
-          </a:p>
-          <a:p>
-            <a:pPr>
-              <a:spcAft>
-                <a:spcPts val="600"/>
-              </a:spcAft>
-            </a:pPr>
-            <a:r>
-              <a:rPr sz="1500">
-                <a:solidFill>
-                  <a:srgbClr val="22282E"/>
-                </a:solidFill>
-              </a:rPr>
-              <a:t>•  (corrupción de memoria, ROP) son las mismas.</a:t>
-            </a:r>
-          </a:p>
-          <a:p>
-            <a:pPr>
-              <a:spcAft>
-                <a:spcPts val="600"/>
-              </a:spcAft>
-            </a:pPr>
-            <a:r>
-              <a:rPr sz="1500">
-                <a:solidFill>
-                  <a:srgbClr val="22282E"/>
-                </a:solidFill>
-              </a:rPr>
-              <a:t>•  ❓ ¿Por dónde sigo? Retos de "kernel pwn" (pwn.college, kernelctf) y lectura del código de drivers</a:t>
-            </a:r>
-          </a:p>
-          <a:p>
-            <a:pPr>
-              <a:spcAft>
-                <a:spcPts val="600"/>
-              </a:spcAft>
-            </a:pPr>
-            <a:r>
-              <a:rPr sz="1500">
-                <a:solidFill>
-                  <a:srgbClr val="22282E"/>
-                </a:solidFill>
-              </a:rPr>
-              <a:t>•  simples.</a:t>
+              <a:t>•  En tu VM con un módulo vulnerable propio, logra escalada de privilegios a root mediante</a:t>
+            </a:r>
+          </a:p>
+          <a:p>
+            <a:pPr>
+              <a:spcAft>
+                <a:spcPts val="600"/>
+              </a:spcAft>
+            </a:pPr>
+            <a:r>
+              <a:rPr sz="1500">
+                <a:solidFill>
+                  <a:srgbClr val="22282E"/>
+                </a:solidFill>
+              </a:rPr>
+              <a:t>•  commitcreds(preparekernelcred(0)), con KASLR desactivado para el primer intento.</a:t>
+            </a:r>
+          </a:p>
+          <a:p>
+            <a:pPr>
+              <a:spcAft>
+                <a:spcPts val="600"/>
+              </a:spcAft>
+            </a:pPr>
+            <a:r>
+              <a:rPr sz="1500">
+                <a:solidFill>
+                  <a:srgbClr val="22282E"/>
+                </a:solidFill>
+              </a:rPr>
+              <a:t>•  Criterio de aceptación: tras ejecutar tu exploit, un id en la VM muestra uid=0(root) y el</a:t>
+            </a:r>
+          </a:p>
+          <a:p>
+            <a:pPr>
+              <a:spcAft>
+                <a:spcPts val="600"/>
+              </a:spcAft>
+            </a:pPr>
+            <a:r>
+              <a:rPr sz="1500">
+                <a:solidFill>
+                  <a:srgbClr val="22282E"/>
+                </a:solidFill>
+              </a:rPr>
+              <a:t>•  sistema sigue estable (retorno limpio a user-space).</a:t>
             </a:r>
           </a:p>
         </p:txBody>
@@ -3511,7 +3499,7 @@
                   <a:srgbClr val="0B3D2E"/>
                 </a:solidFill>
               </a:rPr>
-              <a:t>🔗 Referencias</a:t>
+              <a:t>⚠️ Errores comunes</a:t>
             </a:r>
           </a:p>
         </p:txBody>
@@ -3549,6 +3537,319 @@
                   <a:srgbClr val="22282E"/>
                 </a:solidFill>
               </a:rPr>
+              <a:t>•  Kernel panic / VM colgada — Retorno a user-space mal hecho; guarda/restaura estado (swapgs/iretq)</a:t>
+            </a:r>
+          </a:p>
+          <a:p>
+            <a:pPr>
+              <a:spcAft>
+                <a:spcPts val="600"/>
+              </a:spcAft>
+            </a:pPr>
+            <a:r>
+              <a:rPr sz="1500">
+                <a:solidFill>
+                  <a:srgbClr val="22282E"/>
+                </a:solidFill>
+              </a:rPr>
+              <a:t>•  "no funciona" con KASLR — Necesitas un leak de dirección de kernel</a:t>
+            </a:r>
+          </a:p>
+          <a:p>
+            <a:pPr>
+              <a:spcAft>
+                <a:spcPts val="600"/>
+              </a:spcAft>
+            </a:pPr>
+            <a:r>
+              <a:rPr sz="1500">
+                <a:solidFill>
+                  <a:srgbClr val="22282E"/>
+                </a:solidFill>
+              </a:rPr>
+              <a:t>•  SMEP fault al saltar a user — Usa kernel ROP en vez de ret2usr</a:t>
+            </a:r>
+          </a:p>
+          <a:p>
+            <a:pPr>
+              <a:spcAft>
+                <a:spcPts val="600"/>
+              </a:spcAft>
+            </a:pPr>
+            <a:r>
+              <a:rPr sz="1500">
+                <a:solidFill>
+                  <a:srgbClr val="22282E"/>
+                </a:solidFill>
+              </a:rPr>
+              <a:t>•  Direcciones cambian cada boot — KASLR activo; añade nokaslr para aprender</a:t>
+            </a:r>
+          </a:p>
+          <a:p>
+            <a:pPr>
+              <a:spcAft>
+                <a:spcPts val="600"/>
+              </a:spcAft>
+            </a:pPr>
+            <a:r>
+              <a:rPr sz="1500">
+                <a:solidFill>
+                  <a:srgbClr val="22282E"/>
+                </a:solidFill>
+              </a:rPr>
+              <a:t>•  insmod falla — Módulo compilado contra otros headers; usa los del kernel de la VM</a:t>
+            </a:r>
+          </a:p>
+        </p:txBody>
+      </p:sp>
+    </p:spTree>
+  </p:cSld>
+  <p:clrMapOvr>
+    <a:masterClrMapping/>
+  </p:clrMapOvr>
+</p:sld>
+</file>
+
+<file path=ppt/slides/slide13.xml><?xml version="1.0" encoding="utf-8"?>
+<p:sld xmlns:a="http://schemas.openxmlformats.org/drawingml/2006/main" xmlns:p="http://schemas.openxmlformats.org/presentationml/2006/main" xmlns:r="http://schemas.openxmlformats.org/officeDocument/2006/relationships">
+  <p:cSld>
+    <p:spTree>
+      <p:nvGrpSpPr>
+        <p:cNvPr id="1" name=""/>
+        <p:cNvGrpSpPr/>
+        <p:nvPr/>
+      </p:nvGrpSpPr>
+      <p:grpSpPr/>
+      <p:sp>
+        <p:nvSpPr>
+          <p:cNvPr id="2" name="TextBox 1"/>
+          <p:cNvSpPr txBox="1"/>
+          <p:nvPr/>
+        </p:nvSpPr>
+        <p:spPr>
+          <a:xfrm>
+            <a:off x="457200" y="320040"/>
+            <a:ext cx="8229600" cy="822960"/>
+          </a:xfrm>
+          <a:prstGeom prst="rect">
+            <a:avLst/>
+          </a:prstGeom>
+          <a:noFill/>
+        </p:spPr>
+        <p:txBody>
+          <a:bodyPr wrap="square">
+            <a:spAutoFit/>
+          </a:bodyPr>
+          <a:lstStyle/>
+          <a:p>
+            <a:r>
+              <a:rPr sz="2600" b="1">
+                <a:solidFill>
+                  <a:srgbClr val="0B3D2E"/>
+                </a:solidFill>
+              </a:rPr>
+              <a:t>❓ Preguntas frecuentes</a:t>
+            </a:r>
+          </a:p>
+        </p:txBody>
+      </p:sp>
+      <p:sp>
+        <p:nvSpPr>
+          <p:cNvPr id="3" name="TextBox 2"/>
+          <p:cNvSpPr txBox="1"/>
+          <p:nvPr/>
+        </p:nvSpPr>
+        <p:spPr>
+          <a:xfrm>
+            <a:off x="457200" y="1280160"/>
+            <a:ext cx="8229600" cy="4937760"/>
+          </a:xfrm>
+          <a:prstGeom prst="rect">
+            <a:avLst/>
+          </a:prstGeom>
+          <a:noFill/>
+        </p:spPr>
+        <p:txBody>
+          <a:bodyPr wrap="square">
+            <a:spAutoFit/>
+          </a:bodyPr>
+          <a:lstStyle/>
+          <a:p>
+            <a:pPr>
+              <a:spcAft>
+                <a:spcPts val="600"/>
+              </a:spcAft>
+            </a:pPr>
+            <a:r>
+              <a:rPr sz="1500">
+                <a:solidFill>
+                  <a:srgbClr val="22282E"/>
+                </a:solidFill>
+              </a:rPr>
+              <a:t>•  ❓ ¿Por qué practicar en QEMU y no en el host? Un fallo de kernel puede colgar o corromper el</a:t>
+            </a:r>
+          </a:p>
+          <a:p>
+            <a:pPr>
+              <a:spcAft>
+                <a:spcPts val="600"/>
+              </a:spcAft>
+            </a:pPr>
+            <a:r>
+              <a:rPr sz="1500">
+                <a:solidFill>
+                  <a:srgbClr val="22282E"/>
+                </a:solidFill>
+              </a:rPr>
+              <a:t>•  sistema; QEMU con snapshots te da un entorno desechable.</a:t>
+            </a:r>
+          </a:p>
+          <a:p>
+            <a:pPr>
+              <a:spcAft>
+                <a:spcPts val="600"/>
+              </a:spcAft>
+            </a:pPr>
+            <a:r>
+              <a:rPr sz="1500">
+                <a:solidFill>
+                  <a:srgbClr val="22282E"/>
+                </a:solidFill>
+              </a:rPr>
+              <a:t>•  ❓ ¿Kernel pwn es mucho más difícil? Tiene más mitigaciones y menos margen de error, pero las bases</a:t>
+            </a:r>
+          </a:p>
+          <a:p>
+            <a:pPr>
+              <a:spcAft>
+                <a:spcPts val="600"/>
+              </a:spcAft>
+            </a:pPr>
+            <a:r>
+              <a:rPr sz="1500">
+                <a:solidFill>
+                  <a:srgbClr val="22282E"/>
+                </a:solidFill>
+              </a:rPr>
+              <a:t>•  (corrupción de memoria, ROP) son las mismas.</a:t>
+            </a:r>
+          </a:p>
+          <a:p>
+            <a:pPr>
+              <a:spcAft>
+                <a:spcPts val="600"/>
+              </a:spcAft>
+            </a:pPr>
+            <a:r>
+              <a:rPr sz="1500">
+                <a:solidFill>
+                  <a:srgbClr val="22282E"/>
+                </a:solidFill>
+              </a:rPr>
+              <a:t>•  ❓ ¿Por dónde sigo? Retos de "kernel pwn" (pwn.college, kernelctf) y lectura del código de drivers</a:t>
+            </a:r>
+          </a:p>
+          <a:p>
+            <a:pPr>
+              <a:spcAft>
+                <a:spcPts val="600"/>
+              </a:spcAft>
+            </a:pPr>
+            <a:r>
+              <a:rPr sz="1500">
+                <a:solidFill>
+                  <a:srgbClr val="22282E"/>
+                </a:solidFill>
+              </a:rPr>
+              <a:t>•  simples.</a:t>
+            </a:r>
+          </a:p>
+        </p:txBody>
+      </p:sp>
+    </p:spTree>
+  </p:cSld>
+  <p:clrMapOvr>
+    <a:masterClrMapping/>
+  </p:clrMapOvr>
+</p:sld>
+</file>
+
+<file path=ppt/slides/slide14.xml><?xml version="1.0" encoding="utf-8"?>
+<p:sld xmlns:a="http://schemas.openxmlformats.org/drawingml/2006/main" xmlns:p="http://schemas.openxmlformats.org/presentationml/2006/main" xmlns:r="http://schemas.openxmlformats.org/officeDocument/2006/relationships">
+  <p:cSld>
+    <p:spTree>
+      <p:nvGrpSpPr>
+        <p:cNvPr id="1" name=""/>
+        <p:cNvGrpSpPr/>
+        <p:nvPr/>
+      </p:nvGrpSpPr>
+      <p:grpSpPr/>
+      <p:sp>
+        <p:nvSpPr>
+          <p:cNvPr id="2" name="TextBox 1"/>
+          <p:cNvSpPr txBox="1"/>
+          <p:nvPr/>
+        </p:nvSpPr>
+        <p:spPr>
+          <a:xfrm>
+            <a:off x="457200" y="320040"/>
+            <a:ext cx="8229600" cy="822960"/>
+          </a:xfrm>
+          <a:prstGeom prst="rect">
+            <a:avLst/>
+          </a:prstGeom>
+          <a:noFill/>
+        </p:spPr>
+        <p:txBody>
+          <a:bodyPr wrap="square">
+            <a:spAutoFit/>
+          </a:bodyPr>
+          <a:lstStyle/>
+          <a:p>
+            <a:r>
+              <a:rPr sz="2600" b="1">
+                <a:solidFill>
+                  <a:srgbClr val="0B3D2E"/>
+                </a:solidFill>
+              </a:rPr>
+              <a:t>🔗 Referencias</a:t>
+            </a:r>
+          </a:p>
+        </p:txBody>
+      </p:sp>
+      <p:sp>
+        <p:nvSpPr>
+          <p:cNvPr id="3" name="TextBox 2"/>
+          <p:cNvSpPr txBox="1"/>
+          <p:nvPr/>
+        </p:nvSpPr>
+        <p:spPr>
+          <a:xfrm>
+            <a:off x="457200" y="1280160"/>
+            <a:ext cx="8229600" cy="4937760"/>
+          </a:xfrm>
+          <a:prstGeom prst="rect">
+            <a:avLst/>
+          </a:prstGeom>
+          <a:noFill/>
+        </p:spPr>
+        <p:txBody>
+          <a:bodyPr wrap="square">
+            <a:spAutoFit/>
+          </a:bodyPr>
+          <a:lstStyle/>
+          <a:p>
+            <a:pPr>
+              <a:spcAft>
+                <a:spcPts val="600"/>
+              </a:spcAft>
+            </a:pPr>
+            <a:r>
+              <a:rPr sz="1500">
+                <a:solidFill>
+                  <a:srgbClr val="22282E"/>
+                </a:solidFill>
+              </a:rPr>
               <a:t>•  Perla, E. &amp; Oldani, M. A Guide to Kernel Exploitation. Syngress.</a:t>
             </a:r>
           </a:p>
@@ -3599,6 +3900,81 @@
           </a:p>
         </p:txBody>
       </p:sp>
+    </p:spTree>
+  </p:cSld>
+  <p:clrMapOvr>
+    <a:masterClrMapping/>
+  </p:clrMapOvr>
+</p:sld>
+</file>
+
+<file path=ppt/slides/slide15.xml><?xml version="1.0" encoding="utf-8"?>
+<p:sld xmlns:a="http://schemas.openxmlformats.org/drawingml/2006/main" xmlns:p="http://schemas.openxmlformats.org/presentationml/2006/main" xmlns:r="http://schemas.openxmlformats.org/officeDocument/2006/relationships">
+  <p:cSld>
+    <p:spTree>
+      <p:nvGrpSpPr>
+        <p:cNvPr id="1" name=""/>
+        <p:cNvGrpSpPr/>
+        <p:nvPr/>
+      </p:nvGrpSpPr>
+      <p:grpSpPr/>
+      <p:sp>
+        <p:nvSpPr>
+          <p:cNvPr id="2" name="TextBox 1"/>
+          <p:cNvSpPr txBox="1"/>
+          <p:nvPr/>
+        </p:nvSpPr>
+        <p:spPr>
+          <a:xfrm>
+            <a:off x="457200" y="274320"/>
+            <a:ext cx="8229600" cy="640080"/>
+          </a:xfrm>
+          <a:prstGeom prst="rect">
+            <a:avLst/>
+          </a:prstGeom>
+          <a:noFill/>
+        </p:spPr>
+        <p:txBody>
+          <a:bodyPr wrap="square">
+            <a:spAutoFit/>
+          </a:bodyPr>
+          <a:lstStyle/>
+          <a:p>
+            <a:r>
+              <a:rPr sz="2200" b="1">
+                <a:solidFill>
+                  <a:srgbClr val="0B3D2E"/>
+                </a:solidFill>
+              </a:rPr>
+              <a:t>Diagrama de la clase</a:t>
+            </a:r>
+          </a:p>
+        </p:txBody>
+      </p:sp>
+      <p:pic>
+        <p:nvPicPr>
+          <p:cNvPr id="3" name="Picture 2" descr="3dc2c12a5e097860.png"/>
+          <p:cNvPicPr>
+            <a:picLocks noChangeAspect="1"/>
+          </p:cNvPicPr>
+          <p:nvPr/>
+        </p:nvPicPr>
+        <p:blipFill>
+          <a:blip r:embed="rId2"/>
+          <a:stretch>
+            <a:fillRect/>
+          </a:stretch>
+        </p:blipFill>
+        <p:spPr>
+          <a:xfrm>
+            <a:off x="2014465" y="1097280"/>
+            <a:ext cx="5115070" cy="5303520"/>
+          </a:xfrm>
+          <a:prstGeom prst="rect">
+            <a:avLst/>
+          </a:prstGeom>
+        </p:spPr>
+      </p:pic>
     </p:spTree>
   </p:cSld>
   <p:clrMapOvr>
@@ -3862,7 +4238,7 @@
                   <a:srgbClr val="22282E"/>
                 </a:solidFill>
               </a:rPr>
-              <a:t>•  Describir las mitigaciones de kernel: SMEP, SMAP, KASLR, KPTI, KPTI, stack canaries.</a:t>
+              <a:t>•  Describir las mitigaciones de kernel: SMEP, SMAP, KASLR, KPTI, stack canaries.</a:t>
             </a:r>
           </a:p>
           <a:p>
@@ -4122,7 +4498,7 @@
                   <a:srgbClr val="0B3D2E"/>
                 </a:solidFill>
               </a:rPr>
-              <a:t>📖 Definiciones y características</a:t>
+              <a:t>🧠 Explicación en profundidad</a:t>
             </a:r>
           </a:p>
         </p:txBody>
@@ -4160,97 +4536,97 @@
                   <a:srgbClr val="22282E"/>
                 </a:solidFill>
               </a:rPr>
-              <a:t>•  Kernel-space (ring 0): contexto con acceso total al hardware y a la memoria. Clave: un bug aquí</a:t>
-            </a:r>
-          </a:p>
-          <a:p>
-            <a:pPr>
-              <a:spcAft>
-                <a:spcPts val="600"/>
-              </a:spcAft>
-            </a:pPr>
-            <a:r>
-              <a:rPr sz="1500">
-                <a:solidFill>
-                  <a:srgbClr val="22282E"/>
-                </a:solidFill>
-              </a:rPr>
-              <a:t>•  suele significar control total del sistema.</a:t>
-            </a:r>
-          </a:p>
-          <a:p>
-            <a:pPr>
-              <a:spcAft>
-                <a:spcPts val="600"/>
-              </a:spcAft>
-            </a:pPr>
-            <a:r>
-              <a:rPr sz="1500">
-                <a:solidFill>
-                  <a:srgbClr val="22282E"/>
-                </a:solidFill>
-              </a:rPr>
-              <a:t>•  Superficie de ataque del kernel: syscalls, ioctl de drivers, sistemas de ficheros, red. Clave:</a:t>
-            </a:r>
-          </a:p>
-          <a:p>
-            <a:pPr>
-              <a:spcAft>
-                <a:spcPts val="600"/>
-              </a:spcAft>
-            </a:pPr>
-            <a:r>
-              <a:rPr sz="1500">
-                <a:solidFill>
-                  <a:srgbClr val="22282E"/>
-                </a:solidFill>
-              </a:rPr>
-              <a:t>•  los drivers de terceros son foco frecuente.</a:t>
-            </a:r>
-          </a:p>
-          <a:p>
-            <a:pPr>
-              <a:spcAft>
-                <a:spcPts val="600"/>
-              </a:spcAft>
-            </a:pPr>
-            <a:r>
-              <a:rPr sz="1500">
-                <a:solidFill>
-                  <a:srgbClr val="22282E"/>
-                </a:solidFill>
-              </a:rPr>
-              <a:t>•  SMEP/SMAP: impiden ejecutar (SMEP) o acceder (SMAP) a memoria de usuario desde el kernel. Clave:</a:t>
-            </a:r>
-          </a:p>
-          <a:p>
-            <a:pPr>
-              <a:spcAft>
-                <a:spcPts val="600"/>
-              </a:spcAft>
-            </a:pPr>
-            <a:r>
-              <a:rPr sz="1500">
-                <a:solidFill>
-                  <a:srgbClr val="22282E"/>
-                </a:solidFill>
-              </a:rPr>
-              <a:t>•  bloquean el clásico ret2usr; se evaden con ROP en kernel.</a:t>
-            </a:r>
-          </a:p>
-          <a:p>
-            <a:pPr>
-              <a:spcAft>
-                <a:spcPts val="600"/>
-              </a:spcAft>
-            </a:pPr>
-            <a:r>
-              <a:rPr sz="1500">
-                <a:solidFill>
-                  <a:srgbClr val="22282E"/>
-                </a:solidFill>
-              </a:rPr>
-              <a:t>•  KASLR: aleatoriza la base del kernel. Clave: requiere un leak de una dirección de kernel.</a:t>
+              <a:t>•  La explotación del kernel aplica todo lo aprendido al blanco de mayor valor: el núcleo del</a:t>
+            </a:r>
+          </a:p>
+          <a:p>
+            <a:pPr>
+              <a:spcAft>
+                <a:spcPts val="600"/>
+              </a:spcAft>
+            </a:pPr>
+            <a:r>
+              <a:rPr sz="1500">
+                <a:solidFill>
+                  <a:srgbClr val="22282E"/>
+                </a:solidFill>
+              </a:rPr>
+              <a:t>•  sistema operativo, que se ejecuta en el nivel de privilegio máximo. La diferencia fundamental está en</a:t>
+            </a:r>
+          </a:p>
+          <a:p>
+            <a:pPr>
+              <a:spcAft>
+                <a:spcPts val="600"/>
+              </a:spcAft>
+            </a:pPr>
+            <a:r>
+              <a:rPr sz="1500">
+                <a:solidFill>
+                  <a:srgbClr val="22282E"/>
+                </a:solidFill>
+              </a:rPr>
+              <a:t>•  los anillos de privilegio del procesador: el código de usuario corre en ring 3 (sin</a:t>
+            </a:r>
+          </a:p>
+          <a:p>
+            <a:pPr>
+              <a:spcAft>
+                <a:spcPts val="600"/>
+              </a:spcAft>
+            </a:pPr>
+            <a:r>
+              <a:rPr sz="1500">
+                <a:solidFill>
+                  <a:srgbClr val="22282E"/>
+                </a:solidFill>
+              </a:rPr>
+              <a:t>•  privilegios), y el kernel en ring 0 (control total del hardware, de la memoria de todos los</a:t>
+            </a:r>
+          </a:p>
+          <a:p>
+            <a:pPr>
+              <a:spcAft>
+                <a:spcPts val="600"/>
+              </a:spcAft>
+            </a:pPr>
+            <a:r>
+              <a:rPr sz="1500">
+                <a:solidFill>
+                  <a:srgbClr val="22282E"/>
+                </a:solidFill>
+              </a:rPr>
+              <a:t>•  procesos, de todo). Un exploit de userland (clases anteriores) da control de un proceso; un exploit</a:t>
+            </a:r>
+          </a:p>
+          <a:p>
+            <a:pPr>
+              <a:spcAft>
+                <a:spcPts val="600"/>
+              </a:spcAft>
+            </a:pPr>
+            <a:r>
+              <a:rPr sz="1500">
+                <a:solidFill>
+                  <a:srgbClr val="22282E"/>
+                </a:solidFill>
+              </a:rPr>
+              <a:t>•  de kernel da control del sistema entero —es la escalada de privilegios definitiva, de un usuario</a:t>
+            </a:r>
+          </a:p>
+          <a:p>
+            <a:pPr>
+              <a:spcAft>
+                <a:spcPts val="600"/>
+              </a:spcAft>
+            </a:pPr>
+            <a:r>
+              <a:rPr sz="1500">
+                <a:solidFill>
+                  <a:srgbClr val="22282E"/>
+                </a:solidFill>
+              </a:rPr>
+              <a:t>•  normal a root o SYSTEM, saltándose todos los controles—. Por eso los bugs de kernel son los más</a:t>
             </a:r>
           </a:p>
         </p:txBody>
@@ -4301,7 +4677,7 @@
                   <a:srgbClr val="0B3D2E"/>
                 </a:solidFill>
               </a:rPr>
-              <a:t>🧰 Herramientas y preparación</a:t>
+              <a:t>📖 Definiciones y características</a:t>
             </a:r>
           </a:p>
         </p:txBody>
@@ -4339,22 +4715,97 @@
                   <a:srgbClr val="22282E"/>
                 </a:solidFill>
               </a:rPr>
-              <a:t>•  sudo apt install -y qemu-system-x86 build-essential</a:t>
-            </a:r>
-          </a:p>
-          <a:p>
-            <a:pPr>
-              <a:spcAft>
-                <a:spcPts val="600"/>
-              </a:spcAft>
-            </a:pPr>
-            <a:r>
-              <a:rPr sz="1500">
-                <a:solidFill>
-                  <a:srgbClr val="22282E"/>
-                </a:solidFill>
-              </a:rPr>
-              <a:t>•  Trabaja en QEMU (no en tu host). Toma un snapshot antes de cada intento.</a:t>
+              <a:t>•  Kernel-space (ring 0): contexto con acceso total al hardware y a la memoria. Clave: un bug aquí</a:t>
+            </a:r>
+          </a:p>
+          <a:p>
+            <a:pPr>
+              <a:spcAft>
+                <a:spcPts val="600"/>
+              </a:spcAft>
+            </a:pPr>
+            <a:r>
+              <a:rPr sz="1500">
+                <a:solidFill>
+                  <a:srgbClr val="22282E"/>
+                </a:solidFill>
+              </a:rPr>
+              <a:t>•  suele significar control total del sistema.</a:t>
+            </a:r>
+          </a:p>
+          <a:p>
+            <a:pPr>
+              <a:spcAft>
+                <a:spcPts val="600"/>
+              </a:spcAft>
+            </a:pPr>
+            <a:r>
+              <a:rPr sz="1500">
+                <a:solidFill>
+                  <a:srgbClr val="22282E"/>
+                </a:solidFill>
+              </a:rPr>
+              <a:t>•  Superficie de ataque del kernel: syscalls, ioctl de drivers, sistemas de ficheros, red. Clave:</a:t>
+            </a:r>
+          </a:p>
+          <a:p>
+            <a:pPr>
+              <a:spcAft>
+                <a:spcPts val="600"/>
+              </a:spcAft>
+            </a:pPr>
+            <a:r>
+              <a:rPr sz="1500">
+                <a:solidFill>
+                  <a:srgbClr val="22282E"/>
+                </a:solidFill>
+              </a:rPr>
+              <a:t>•  los drivers de terceros son foco frecuente.</a:t>
+            </a:r>
+          </a:p>
+          <a:p>
+            <a:pPr>
+              <a:spcAft>
+                <a:spcPts val="600"/>
+              </a:spcAft>
+            </a:pPr>
+            <a:r>
+              <a:rPr sz="1500">
+                <a:solidFill>
+                  <a:srgbClr val="22282E"/>
+                </a:solidFill>
+              </a:rPr>
+              <a:t>•  SMEP/SMAP: impiden ejecutar (SMEP) o acceder (SMAP) a memoria de usuario desde el kernel. Clave:</a:t>
+            </a:r>
+          </a:p>
+          <a:p>
+            <a:pPr>
+              <a:spcAft>
+                <a:spcPts val="600"/>
+              </a:spcAft>
+            </a:pPr>
+            <a:r>
+              <a:rPr sz="1500">
+                <a:solidFill>
+                  <a:srgbClr val="22282E"/>
+                </a:solidFill>
+              </a:rPr>
+              <a:t>•  bloquean el clásico ret2usr; se evaden con ROP en kernel.</a:t>
+            </a:r>
+          </a:p>
+          <a:p>
+            <a:pPr>
+              <a:spcAft>
+                <a:spcPts val="600"/>
+              </a:spcAft>
+            </a:pPr>
+            <a:r>
+              <a:rPr sz="1500">
+                <a:solidFill>
+                  <a:srgbClr val="22282E"/>
+                </a:solidFill>
+              </a:rPr>
+              <a:t>•  KASLR: aleatoriza la base del kernel. Clave: requiere un leak de una dirección de kernel.</a:t>
             </a:r>
           </a:p>
         </p:txBody>
@@ -4405,7 +4856,7 @@
                   <a:srgbClr val="0B3D2E"/>
                 </a:solidFill>
               </a:rPr>
-              <a:t>🧪 Laboratorio guiado</a:t>
+              <a:t>📔 Glosario</a:t>
             </a:r>
           </a:p>
         </p:txBody>
@@ -4443,97 +4894,97 @@
                   <a:srgbClr val="22282E"/>
                 </a:solidFill>
               </a:rPr>
-              <a:t>•  Compila un módulo de práctica con un copyfromuser sin acotar (bug deliberado) que exponga un</a:t>
-            </a:r>
-          </a:p>
-          <a:p>
-            <a:pPr>
-              <a:spcAft>
-                <a:spcPts val="600"/>
-              </a:spcAft>
-            </a:pPr>
-            <a:r>
-              <a:rPr sz="1500">
-                <a:solidFill>
-                  <a:srgbClr val="22282E"/>
-                </a:solidFill>
-              </a:rPr>
-              <a:t>•  ioctl/write vulnerable. Cárgalo con insmod en la VM.</a:t>
-            </a:r>
-          </a:p>
-          <a:p>
-            <a:pPr>
-              <a:spcAft>
-                <a:spcPts val="600"/>
-              </a:spcAft>
-            </a:pPr>
-            <a:r>
-              <a:rPr sz="1500">
-                <a:solidFill>
-                  <a:srgbClr val="22282E"/>
-                </a:solidFill>
-              </a:rPr>
-              <a:t>•  Arranca la VM en QEMU con parámetros conocidos para controlar las mitigaciones (para el primer</a:t>
-            </a:r>
-          </a:p>
-          <a:p>
-            <a:pPr>
-              <a:spcAft>
-                <a:spcPts val="600"/>
-              </a:spcAft>
-            </a:pPr>
-            <a:r>
-              <a:rPr sz="1500">
-                <a:solidFill>
-                  <a:srgbClr val="22282E"/>
-                </a:solidFill>
-              </a:rPr>
-              <a:t>•  ejercicio puedes desactivar KASLR con nokaslr y observar direcciones estables):</a:t>
-            </a:r>
-          </a:p>
-          <a:p>
-            <a:pPr>
-              <a:spcAft>
-                <a:spcPts val="600"/>
-              </a:spcAft>
-            </a:pPr>
-            <a:r>
-              <a:rPr sz="1500">
-                <a:solidFill>
-                  <a:srgbClr val="22282E"/>
-                </a:solidFill>
-              </a:rPr>
-              <a:t>•  qemu-system-x8664 -kernel bzImage -initrd initramfs.cpio.gz \</a:t>
-            </a:r>
-          </a:p>
-          <a:p>
-            <a:pPr>
-              <a:spcAft>
-                <a:spcPts val="600"/>
-              </a:spcAft>
-            </a:pPr>
-            <a:r>
-              <a:rPr sz="1500">
-                <a:solidFill>
-                  <a:srgbClr val="22282E"/>
-                </a:solidFill>
-              </a:rPr>
-              <a:t>•  -append "console=ttyS0 nokaslr" -nographic</a:t>
-            </a:r>
-          </a:p>
-          <a:p>
-            <a:pPr>
-              <a:spcAft>
-                <a:spcPts val="600"/>
-              </a:spcAft>
-            </a:pPr>
-            <a:r>
-              <a:rPr sz="1500">
-                <a:solidFill>
-                  <a:srgbClr val="22282E"/>
-                </a:solidFill>
-              </a:rPr>
-              <a:t>•  Desde user-space, escribe un programa que abra el device y dispare el overflow del módulo,</a:t>
+              <a:t>•  Término — Definición concisa</a:t>
+            </a:r>
+          </a:p>
+          <a:p>
+            <a:pPr>
+              <a:spcAft>
+                <a:spcPts val="600"/>
+              </a:spcAft>
+            </a:pPr>
+            <a:r>
+              <a:rPr sz="1500">
+                <a:solidFill>
+                  <a:srgbClr val="22282E"/>
+                </a:solidFill>
+              </a:rPr>
+              <a:t>•  Kernel exploitation — Explotar el núcleo del sistema operativo</a:t>
+            </a:r>
+          </a:p>
+          <a:p>
+            <a:pPr>
+              <a:spcAft>
+                <a:spcPts val="600"/>
+              </a:spcAft>
+            </a:pPr>
+            <a:r>
+              <a:rPr sz="1500">
+                <a:solidFill>
+                  <a:srgbClr val="22282E"/>
+                </a:solidFill>
+              </a:rPr>
+              <a:t>•  Anillo de privilegio — Nivel del procesador: ring 3 usuario, ring 0 kernel</a:t>
+            </a:r>
+          </a:p>
+          <a:p>
+            <a:pPr>
+              <a:spcAft>
+                <a:spcPts val="600"/>
+              </a:spcAft>
+            </a:pPr>
+            <a:r>
+              <a:rPr sz="1500">
+                <a:solidFill>
+                  <a:srgbClr val="22282E"/>
+                </a:solidFill>
+              </a:rPr>
+              <a:t>•  Ring 0 — Máximo privilegio; control total del sistema</a:t>
+            </a:r>
+          </a:p>
+          <a:p>
+            <a:pPr>
+              <a:spcAft>
+                <a:spcPts val="600"/>
+              </a:spcAft>
+            </a:pPr>
+            <a:r>
+              <a:rPr sz="1500">
+                <a:solidFill>
+                  <a:srgbClr val="22282E"/>
+                </a:solidFill>
+              </a:rPr>
+              <a:t>•  Superficie de kernel — syscalls, ioctl y drivers</a:t>
+            </a:r>
+          </a:p>
+          <a:p>
+            <a:pPr>
+              <a:spcAft>
+                <a:spcPts val="600"/>
+              </a:spcAft>
+            </a:pPr>
+            <a:r>
+              <a:rPr sz="1500">
+                <a:solidFill>
+                  <a:srgbClr val="22282E"/>
+                </a:solidFill>
+              </a:rPr>
+              <a:t>•  Driver — Mayor fuente de bugs de kernel</a:t>
+            </a:r>
+          </a:p>
+          <a:p>
+            <a:pPr>
+              <a:spcAft>
+                <a:spcPts val="600"/>
+              </a:spcAft>
+            </a:pPr>
+            <a:r>
+              <a:rPr sz="1500">
+                <a:solidFill>
+                  <a:srgbClr val="22282E"/>
+                </a:solidFill>
+              </a:rPr>
+              <a:t>•  commitcreds(preparekernelcred(0)) — Patrón para darse root desde el kernel</a:t>
             </a:r>
           </a:p>
         </p:txBody>
@@ -4584,7 +5035,7 @@
                   <a:srgbClr val="0B3D2E"/>
                 </a:solidFill>
               </a:rPr>
-              <a:t>✍️ Ejercicios</a:t>
+              <a:t>🧰 Herramientas y preparación</a:t>
             </a:r>
           </a:p>
         </p:txBody>
@@ -4622,82 +5073,7 @@
                   <a:srgbClr val="22282E"/>
                 </a:solidFill>
               </a:rPr>
-              <a:t>•  Enumera cuatro fuentes de superficie de ataque de un kernel Linux.</a:t>
-            </a:r>
-          </a:p>
-          <a:p>
-            <a:pPr>
-              <a:spcAft>
-                <a:spcPts val="600"/>
-              </a:spcAft>
-            </a:pPr>
-            <a:r>
-              <a:rPr sz="1500">
-                <a:solidFill>
-                  <a:srgbClr val="22282E"/>
-                </a:solidFill>
-              </a:rPr>
-              <a:t>•  Explica por qué SMEP rompe el ret2usr y cómo se evade con kernel ROP.</a:t>
-            </a:r>
-          </a:p>
-          <a:p>
-            <a:pPr>
-              <a:spcAft>
-                <a:spcPts val="600"/>
-              </a:spcAft>
-            </a:pPr>
-            <a:r>
-              <a:rPr sz="1500">
-                <a:solidFill>
-                  <a:srgbClr val="22282E"/>
-                </a:solidFill>
-              </a:rPr>
-              <a:t>•  Describe el papel de preparekernelcred(0) y commitcreds.</a:t>
-            </a:r>
-          </a:p>
-          <a:p>
-            <a:pPr>
-              <a:spcAft>
-                <a:spcPts val="600"/>
-              </a:spcAft>
-            </a:pPr>
-            <a:r>
-              <a:rPr sz="1500">
-                <a:solidFill>
-                  <a:srgbClr val="22282E"/>
-                </a:solidFill>
-              </a:rPr>
-              <a:t>•  Configura QEMU con y sin nokaslr y compara direcciones.</a:t>
-            </a:r>
-          </a:p>
-          <a:p>
-            <a:pPr>
-              <a:spcAft>
-                <a:spcPts val="600"/>
-              </a:spcAft>
-            </a:pPr>
-            <a:r>
-              <a:rPr sz="1500">
-                <a:solidFill>
-                  <a:srgbClr val="22282E"/>
-                </a:solidFill>
-              </a:rPr>
-              <a:t>•  Explica qué complica KPTI en el retorno a user-space.</a:t>
-            </a:r>
-          </a:p>
-          <a:p>
-            <a:pPr>
-              <a:spcAft>
-                <a:spcPts val="600"/>
-              </a:spcAft>
-            </a:pPr>
-            <a:r>
-              <a:rPr sz="1500">
-                <a:solidFill>
-                  <a:srgbClr val="22282E"/>
-                </a:solidFill>
-              </a:rPr>
-              <a:t>•  Identifica un CVE reciente de driver Linux y resume su clase de bug.</a:t>
+              <a:t>•  Trabaja en QEMU (no en tu host). Toma un snapshot antes de cada intento.</a:t>
             </a:r>
           </a:p>
         </p:txBody>
@@ -4748,7 +5124,7 @@
                   <a:srgbClr val="0B3D2E"/>
                 </a:solidFill>
               </a:rPr>
-              <a:t>📝 Reto verificable</a:t>
+              <a:t>🧪 Laboratorio guiado</a:t>
             </a:r>
           </a:p>
         </p:txBody>
@@ -4786,52 +5162,97 @@
                   <a:srgbClr val="22282E"/>
                 </a:solidFill>
               </a:rPr>
-              <a:t>•  En tu VM con un módulo vulnerable propio, logra escalada de privilegios a root mediante</a:t>
-            </a:r>
-          </a:p>
-          <a:p>
-            <a:pPr>
-              <a:spcAft>
-                <a:spcPts val="600"/>
-              </a:spcAft>
-            </a:pPr>
-            <a:r>
-              <a:rPr sz="1500">
-                <a:solidFill>
-                  <a:srgbClr val="22282E"/>
-                </a:solidFill>
-              </a:rPr>
-              <a:t>•  commitcreds(preparekernelcred(0)), con KASLR desactivado para el primer intento.</a:t>
-            </a:r>
-          </a:p>
-          <a:p>
-            <a:pPr>
-              <a:spcAft>
-                <a:spcPts val="600"/>
-              </a:spcAft>
-            </a:pPr>
-            <a:r>
-              <a:rPr sz="1500">
-                <a:solidFill>
-                  <a:srgbClr val="22282E"/>
-                </a:solidFill>
-              </a:rPr>
-              <a:t>•  Criterio de aceptación: tras ejecutar tu exploit, un id en la VM muestra uid=0(root) y el</a:t>
-            </a:r>
-          </a:p>
-          <a:p>
-            <a:pPr>
-              <a:spcAft>
-                <a:spcPts val="600"/>
-              </a:spcAft>
-            </a:pPr>
-            <a:r>
-              <a:rPr sz="1500">
-                <a:solidFill>
-                  <a:srgbClr val="22282E"/>
-                </a:solidFill>
-              </a:rPr>
-              <a:t>•  sistema sigue estable (retorno limpio a user-space).</a:t>
+              <a:t>•  Compila un módulo de práctica con un copyfromuser sin acotar (bug deliberado) que exponga un</a:t>
+            </a:r>
+          </a:p>
+          <a:p>
+            <a:pPr>
+              <a:spcAft>
+                <a:spcPts val="600"/>
+              </a:spcAft>
+            </a:pPr>
+            <a:r>
+              <a:rPr sz="1500">
+                <a:solidFill>
+                  <a:srgbClr val="22282E"/>
+                </a:solidFill>
+              </a:rPr>
+              <a:t>•  ioctl/write vulnerable. Cárgalo con insmod en la VM.</a:t>
+            </a:r>
+          </a:p>
+          <a:p>
+            <a:pPr>
+              <a:spcAft>
+                <a:spcPts val="600"/>
+              </a:spcAft>
+            </a:pPr>
+            <a:r>
+              <a:rPr sz="1500">
+                <a:solidFill>
+                  <a:srgbClr val="22282E"/>
+                </a:solidFill>
+              </a:rPr>
+              <a:t>•  Arranca la VM en QEMU con parámetros conocidos para controlar las mitigaciones (para el primer</a:t>
+            </a:r>
+          </a:p>
+          <a:p>
+            <a:pPr>
+              <a:spcAft>
+                <a:spcPts val="600"/>
+              </a:spcAft>
+            </a:pPr>
+            <a:r>
+              <a:rPr sz="1500">
+                <a:solidFill>
+                  <a:srgbClr val="22282E"/>
+                </a:solidFill>
+              </a:rPr>
+              <a:t>•  ejercicio puedes desactivar KASLR con nokaslr y observar direcciones estables):</a:t>
+            </a:r>
+          </a:p>
+          <a:p>
+            <a:pPr>
+              <a:spcAft>
+                <a:spcPts val="600"/>
+              </a:spcAft>
+            </a:pPr>
+            <a:r>
+              <a:rPr sz="1500">
+                <a:solidFill>
+                  <a:srgbClr val="22282E"/>
+                </a:solidFill>
+              </a:rPr>
+              <a:t>•  Desde user-space, escribe un programa que abra el device y dispare el overflow del módulo,</a:t>
+            </a:r>
+          </a:p>
+          <a:p>
+            <a:pPr>
+              <a:spcAft>
+                <a:spcPts val="600"/>
+              </a:spcAft>
+            </a:pPr>
+            <a:r>
+              <a:rPr sz="1500">
+                <a:solidFill>
+                  <a:srgbClr val="22282E"/>
+                </a:solidFill>
+              </a:rPr>
+              <a:t>•  controlando el flujo de ejecución del kernel.</a:t>
+            </a:r>
+          </a:p>
+          <a:p>
+            <a:pPr>
+              <a:spcAft>
+                <a:spcPts val="600"/>
+              </a:spcAft>
+            </a:pPr>
+            <a:r>
+              <a:rPr sz="1500">
+                <a:solidFill>
+                  <a:srgbClr val="22282E"/>
+                </a:solidFill>
+              </a:rPr>
+              <a:t>•  Construye el payload de escalada: una cadena que ejecute</a:t>
             </a:r>
           </a:p>
         </p:txBody>
